--- a/09-Terraform/Session3/09-Modules-Multi-Environment.pptx
+++ b/09-Terraform/Session3/09-Modules-Multi-Environment.pptx
@@ -2072,7 +2072,7 @@
                 <a:ea typeface="Arial" pitchFamily="34" charset="-122"/>
                 <a:cs typeface="Arial" pitchFamily="34" charset="-120"/>
               </a:rPr>
-              <a:t> (dev inputs: t2.micro, no versioning) inside dev folder</a:t>
+              <a:t> (dev inputs: t3.micro, no versioning) inside dev folder</a:t>
             </a:r>
             <a:endParaRPr lang="en-US" sz="1200" dirty="0"/>
           </a:p>
@@ -2126,7 +2126,7 @@
                 <a:ea typeface="Arial" pitchFamily="34" charset="-122"/>
                 <a:cs typeface="Arial" pitchFamily="34" charset="-120"/>
               </a:rPr>
-              <a:t> inputs: t2.small, versioning on) inside </a:t>
+              <a:t> inputs: t3.small, versioning on) inside </a:t>
             </a:r>
             <a:r>
               <a:rPr lang="en-US" sz="1200" dirty="0" err="1">
@@ -2180,7 +2180,7 @@
                 <a:ea typeface="Arial" pitchFamily="34" charset="-122"/>
                 <a:cs typeface="Arial" pitchFamily="34" charset="-120"/>
               </a:rPr>
-              <a:t> (prod inputs: t2.large, versioning on) inside prod folder</a:t>
+              <a:t> (prod inputs: t3.large, versioning on) inside prod folder</a:t>
             </a:r>
             <a:endParaRPr lang="en-US" sz="1200" dirty="0"/>
           </a:p>
@@ -3014,7 +3014,29 @@
                 <a:ea typeface="Arial" pitchFamily="34" charset="-122"/>
                 <a:cs typeface="Arial" pitchFamily="34" charset="-120"/>
               </a:rPr>
-              <a:t>Set required_version and provider version constraints</a:t>
+              <a:t>Set </a:t>
+            </a:r>
+            <a:r>
+              <a:rPr lang="en-US" sz="1300" dirty="0" err="1">
+                <a:solidFill>
+                  <a:srgbClr val="3A4668"/>
+                </a:solidFill>
+                <a:latin typeface="Arial" pitchFamily="34" charset="0"/>
+                <a:ea typeface="Arial" pitchFamily="34" charset="-122"/>
+                <a:cs typeface="Arial" pitchFamily="34" charset="-120"/>
+              </a:rPr>
+              <a:t>required_version</a:t>
+            </a:r>
+            <a:r>
+              <a:rPr lang="en-US" sz="1300" dirty="0">
+                <a:solidFill>
+                  <a:srgbClr val="3A4668"/>
+                </a:solidFill>
+                <a:latin typeface="Arial" pitchFamily="34" charset="0"/>
+                <a:ea typeface="Arial" pitchFamily="34" charset="-122"/>
+                <a:cs typeface="Arial" pitchFamily="34" charset="-120"/>
+              </a:rPr>
+              <a:t> and provider version constraints</a:t>
             </a:r>
             <a:endParaRPr lang="en-US" sz="1300" dirty="0"/>
           </a:p>
